--- a/seance_1/léo/diagramme.pptx
+++ b/seance_1/léo/diagramme.pptx
@@ -6,6 +6,7 @@
   </p:sldMasterIdLst>
   <p:sldIdLst>
     <p:sldId id="256" r:id="rId2"/>
+    <p:sldId id="257" r:id="rId3"/>
   </p:sldIdLst>
   <p:sldSz cx="12192000" cy="6858000"/>
   <p:notesSz cx="6858000" cy="9144000"/>
@@ -104,6 +105,11 @@
       </a:defRPr>
     </a:lvl9pPr>
   </p:defaultTextStyle>
+  <p:extLst>
+    <p:ext uri="{EFAFB233-063F-42B5-8137-9DF3F51BA10A}">
+      <p15:sldGuideLst xmlns:p15="http://schemas.microsoft.com/office/powerpoint/2012/main"/>
+    </p:ext>
+  </p:extLst>
 </p:presentation>
 </file>
 
@@ -254,7 +260,7 @@
           <a:p>
             <a:fld id="{98ABCE3E-48BC-41D0-AD3C-1E63576CBC75}" type="datetimeFigureOut">
               <a:rPr lang="fr-FR" smtClean="0"/>
-              <a:t>04/06/2026</a:t>
+              <a:t>08/06/2026</a:t>
             </a:fld>
             <a:endParaRPr lang="fr-FR"/>
           </a:p>
@@ -452,7 +458,7 @@
           <a:p>
             <a:fld id="{98ABCE3E-48BC-41D0-AD3C-1E63576CBC75}" type="datetimeFigureOut">
               <a:rPr lang="fr-FR" smtClean="0"/>
-              <a:t>04/06/2026</a:t>
+              <a:t>08/06/2026</a:t>
             </a:fld>
             <a:endParaRPr lang="fr-FR"/>
           </a:p>
@@ -660,7 +666,7 @@
           <a:p>
             <a:fld id="{98ABCE3E-48BC-41D0-AD3C-1E63576CBC75}" type="datetimeFigureOut">
               <a:rPr lang="fr-FR" smtClean="0"/>
-              <a:t>04/06/2026</a:t>
+              <a:t>08/06/2026</a:t>
             </a:fld>
             <a:endParaRPr lang="fr-FR"/>
           </a:p>
@@ -858,7 +864,7 @@
           <a:p>
             <a:fld id="{98ABCE3E-48BC-41D0-AD3C-1E63576CBC75}" type="datetimeFigureOut">
               <a:rPr lang="fr-FR" smtClean="0"/>
-              <a:t>04/06/2026</a:t>
+              <a:t>08/06/2026</a:t>
             </a:fld>
             <a:endParaRPr lang="fr-FR"/>
           </a:p>
@@ -1133,7 +1139,7 @@
           <a:p>
             <a:fld id="{98ABCE3E-48BC-41D0-AD3C-1E63576CBC75}" type="datetimeFigureOut">
               <a:rPr lang="fr-FR" smtClean="0"/>
-              <a:t>04/06/2026</a:t>
+              <a:t>08/06/2026</a:t>
             </a:fld>
             <a:endParaRPr lang="fr-FR"/>
           </a:p>
@@ -1398,7 +1404,7 @@
           <a:p>
             <a:fld id="{98ABCE3E-48BC-41D0-AD3C-1E63576CBC75}" type="datetimeFigureOut">
               <a:rPr lang="fr-FR" smtClean="0"/>
-              <a:t>04/06/2026</a:t>
+              <a:t>08/06/2026</a:t>
             </a:fld>
             <a:endParaRPr lang="fr-FR"/>
           </a:p>
@@ -1810,7 +1816,7 @@
           <a:p>
             <a:fld id="{98ABCE3E-48BC-41D0-AD3C-1E63576CBC75}" type="datetimeFigureOut">
               <a:rPr lang="fr-FR" smtClean="0"/>
-              <a:t>04/06/2026</a:t>
+              <a:t>08/06/2026</a:t>
             </a:fld>
             <a:endParaRPr lang="fr-FR"/>
           </a:p>
@@ -1951,7 +1957,7 @@
           <a:p>
             <a:fld id="{98ABCE3E-48BC-41D0-AD3C-1E63576CBC75}" type="datetimeFigureOut">
               <a:rPr lang="fr-FR" smtClean="0"/>
-              <a:t>04/06/2026</a:t>
+              <a:t>08/06/2026</a:t>
             </a:fld>
             <a:endParaRPr lang="fr-FR"/>
           </a:p>
@@ -2064,7 +2070,7 @@
           <a:p>
             <a:fld id="{98ABCE3E-48BC-41D0-AD3C-1E63576CBC75}" type="datetimeFigureOut">
               <a:rPr lang="fr-FR" smtClean="0"/>
-              <a:t>04/06/2026</a:t>
+              <a:t>08/06/2026</a:t>
             </a:fld>
             <a:endParaRPr lang="fr-FR"/>
           </a:p>
@@ -2375,7 +2381,7 @@
           <a:p>
             <a:fld id="{98ABCE3E-48BC-41D0-AD3C-1E63576CBC75}" type="datetimeFigureOut">
               <a:rPr lang="fr-FR" smtClean="0"/>
-              <a:t>04/06/2026</a:t>
+              <a:t>08/06/2026</a:t>
             </a:fld>
             <a:endParaRPr lang="fr-FR"/>
           </a:p>
@@ -2663,7 +2669,7 @@
           <a:p>
             <a:fld id="{98ABCE3E-48BC-41D0-AD3C-1E63576CBC75}" type="datetimeFigureOut">
               <a:rPr lang="fr-FR" smtClean="0"/>
-              <a:t>04/06/2026</a:t>
+              <a:t>08/06/2026</a:t>
             </a:fld>
             <a:endParaRPr lang="fr-FR"/>
           </a:p>
@@ -2904,7 +2910,7 @@
           <a:p>
             <a:fld id="{98ABCE3E-48BC-41D0-AD3C-1E63576CBC75}" type="datetimeFigureOut">
               <a:rPr lang="fr-FR" smtClean="0"/>
-              <a:t>04/06/2026</a:t>
+              <a:t>08/06/2026</a:t>
             </a:fld>
             <a:endParaRPr lang="fr-FR"/>
           </a:p>
@@ -4467,6 +4473,1064 @@
     <p:extLst>
       <p:ext uri="{BB962C8B-B14F-4D97-AF65-F5344CB8AC3E}">
         <p14:creationId xmlns:p14="http://schemas.microsoft.com/office/powerpoint/2010/main" val="3074469123"/>
+      </p:ext>
+    </p:extLst>
+  </p:cSld>
+  <p:clrMapOvr>
+    <a:masterClrMapping/>
+  </p:clrMapOvr>
+</p:sld>
+</file>
+
+<file path=ppt/slides/slide2.xml><?xml version="1.0" encoding="utf-8"?>
+<p:sld xmlns:a="http://schemas.openxmlformats.org/drawingml/2006/main" xmlns:r="http://schemas.openxmlformats.org/officeDocument/2006/relationships" xmlns:p="http://schemas.openxmlformats.org/presentationml/2006/main">
+  <p:cSld>
+    <p:spTree>
+      <p:nvGrpSpPr>
+        <p:cNvPr id="1" name="">
+          <a:extLst>
+            <a:ext uri="{FF2B5EF4-FFF2-40B4-BE49-F238E27FC236}">
+              <a16:creationId xmlns:a16="http://schemas.microsoft.com/office/drawing/2014/main" id="{80C50DD0-2D70-5B75-1DDB-4C06DADEB9E3}"/>
+            </a:ext>
+          </a:extLst>
+        </p:cNvPr>
+        <p:cNvGrpSpPr/>
+        <p:nvPr/>
+      </p:nvGrpSpPr>
+      <p:grpSpPr>
+        <a:xfrm>
+          <a:off x="0" y="0"/>
+          <a:ext cx="0" cy="0"/>
+          <a:chOff x="0" y="0"/>
+          <a:chExt cx="0" cy="0"/>
+        </a:xfrm>
+      </p:grpSpPr>
+      <p:sp>
+        <p:nvSpPr>
+          <p:cNvPr id="4" name="ZoneTexte 3">
+            <a:extLst>
+              <a:ext uri="{FF2B5EF4-FFF2-40B4-BE49-F238E27FC236}">
+                <a16:creationId xmlns:a16="http://schemas.microsoft.com/office/drawing/2014/main" id="{67519711-C498-807F-46AE-69CEE46547FB}"/>
+              </a:ext>
+            </a:extLst>
+          </p:cNvPr>
+          <p:cNvSpPr txBox="1"/>
+          <p:nvPr/>
+        </p:nvSpPr>
+        <p:spPr>
+          <a:xfrm>
+            <a:off x="5392993" y="394503"/>
+            <a:ext cx="1499420" cy="461665"/>
+          </a:xfrm>
+          <a:prstGeom prst="rect">
+            <a:avLst/>
+          </a:prstGeom>
+          <a:noFill/>
+          <a:ln>
+            <a:solidFill>
+              <a:schemeClr val="tx1"/>
+            </a:solidFill>
+            <a:prstDash val="dash"/>
+          </a:ln>
+        </p:spPr>
+        <p:txBody>
+          <a:bodyPr wrap="square" rtlCol="0">
+            <a:spAutoFit/>
+          </a:bodyPr>
+          <a:lstStyle/>
+          <a:p>
+            <a:r>
+              <a:rPr lang="fr-FR" sz="2400" dirty="0">
+                <a:latin typeface="Calibri" panose="020F0502020204030204" pitchFamily="34" charset="0"/>
+                <a:ea typeface="Calibri" panose="020F0502020204030204" pitchFamily="34" charset="0"/>
+                <a:cs typeface="Calibri" panose="020F0502020204030204" pitchFamily="34" charset="0"/>
+              </a:rPr>
+              <a:t>BPI r=35 ?</a:t>
+            </a:r>
+          </a:p>
+        </p:txBody>
+      </p:sp>
+      <p:sp>
+        <p:nvSpPr>
+          <p:cNvPr id="5" name="ZoneTexte 4">
+            <a:extLst>
+              <a:ext uri="{FF2B5EF4-FFF2-40B4-BE49-F238E27FC236}">
+                <a16:creationId xmlns:a16="http://schemas.microsoft.com/office/drawing/2014/main" id="{A882F96F-EE12-2953-CA40-3618450659A2}"/>
+              </a:ext>
+            </a:extLst>
+          </p:cNvPr>
+          <p:cNvSpPr txBox="1"/>
+          <p:nvPr/>
+        </p:nvSpPr>
+        <p:spPr>
+          <a:xfrm>
+            <a:off x="3653907" y="1155116"/>
+            <a:ext cx="1360538" cy="369332"/>
+          </a:xfrm>
+          <a:prstGeom prst="rect">
+            <a:avLst/>
+          </a:prstGeom>
+          <a:noFill/>
+        </p:spPr>
+        <p:txBody>
+          <a:bodyPr wrap="square" rtlCol="0">
+            <a:spAutoFit/>
+          </a:bodyPr>
+          <a:lstStyle/>
+          <a:p>
+            <a:r>
+              <a:rPr lang="fr-FR" dirty="0"/>
+              <a:t>BPI &lt;=-0,4</a:t>
+            </a:r>
+          </a:p>
+        </p:txBody>
+      </p:sp>
+      <p:sp>
+        <p:nvSpPr>
+          <p:cNvPr id="6" name="ZoneTexte 5">
+            <a:extLst>
+              <a:ext uri="{FF2B5EF4-FFF2-40B4-BE49-F238E27FC236}">
+                <a16:creationId xmlns:a16="http://schemas.microsoft.com/office/drawing/2014/main" id="{EC0E3BAB-B836-02D9-D135-D77FC3595418}"/>
+              </a:ext>
+            </a:extLst>
+          </p:cNvPr>
+          <p:cNvSpPr txBox="1"/>
+          <p:nvPr/>
+        </p:nvSpPr>
+        <p:spPr>
+          <a:xfrm>
+            <a:off x="7792671" y="1339782"/>
+            <a:ext cx="1226575" cy="369332"/>
+          </a:xfrm>
+          <a:prstGeom prst="rect">
+            <a:avLst/>
+          </a:prstGeom>
+          <a:noFill/>
+        </p:spPr>
+        <p:txBody>
+          <a:bodyPr wrap="square" rtlCol="0">
+            <a:spAutoFit/>
+          </a:bodyPr>
+          <a:lstStyle/>
+          <a:p>
+            <a:r>
+              <a:rPr lang="fr-FR" dirty="0"/>
+              <a:t>BPI &gt;=0,5</a:t>
+            </a:r>
+          </a:p>
+        </p:txBody>
+      </p:sp>
+      <p:sp>
+        <p:nvSpPr>
+          <p:cNvPr id="7" name="ZoneTexte 6">
+            <a:extLst>
+              <a:ext uri="{FF2B5EF4-FFF2-40B4-BE49-F238E27FC236}">
+                <a16:creationId xmlns:a16="http://schemas.microsoft.com/office/drawing/2014/main" id="{97C0D9F9-91BC-3E67-94D7-25156DA02F14}"/>
+              </a:ext>
+            </a:extLst>
+          </p:cNvPr>
+          <p:cNvSpPr txBox="1"/>
+          <p:nvPr/>
+        </p:nvSpPr>
+        <p:spPr>
+          <a:xfrm>
+            <a:off x="6095998" y="1821730"/>
+            <a:ext cx="1597742" cy="369332"/>
+          </a:xfrm>
+          <a:prstGeom prst="rect">
+            <a:avLst/>
+          </a:prstGeom>
+          <a:noFill/>
+        </p:spPr>
+        <p:txBody>
+          <a:bodyPr wrap="square" rtlCol="0">
+            <a:spAutoFit/>
+          </a:bodyPr>
+          <a:lstStyle/>
+          <a:p>
+            <a:r>
+              <a:rPr lang="fr-FR" dirty="0"/>
+              <a:t>-0,4&lt;BPI&lt;0,5</a:t>
+            </a:r>
+          </a:p>
+        </p:txBody>
+      </p:sp>
+      <p:sp>
+        <p:nvSpPr>
+          <p:cNvPr id="8" name="ZoneTexte 7">
+            <a:extLst>
+              <a:ext uri="{FF2B5EF4-FFF2-40B4-BE49-F238E27FC236}">
+                <a16:creationId xmlns:a16="http://schemas.microsoft.com/office/drawing/2014/main" id="{DE249C6D-C812-4B4B-DDED-470B332E4F68}"/>
+              </a:ext>
+            </a:extLst>
+          </p:cNvPr>
+          <p:cNvSpPr txBox="1"/>
+          <p:nvPr/>
+        </p:nvSpPr>
+        <p:spPr>
+          <a:xfrm>
+            <a:off x="2222089" y="2276237"/>
+            <a:ext cx="1553497" cy="369332"/>
+          </a:xfrm>
+          <a:prstGeom prst="rect">
+            <a:avLst/>
+          </a:prstGeom>
+          <a:noFill/>
+          <a:ln>
+            <a:solidFill>
+              <a:schemeClr val="tx1"/>
+            </a:solidFill>
+          </a:ln>
+        </p:spPr>
+        <p:txBody>
+          <a:bodyPr wrap="square" rtlCol="0">
+            <a:spAutoFit/>
+          </a:bodyPr>
+          <a:lstStyle/>
+          <a:p>
+            <a:r>
+              <a:rPr lang="fr-FR" dirty="0"/>
+              <a:t>Pied de dune</a:t>
+            </a:r>
+          </a:p>
+        </p:txBody>
+      </p:sp>
+      <p:sp>
+        <p:nvSpPr>
+          <p:cNvPr id="9" name="ZoneTexte 8">
+            <a:extLst>
+              <a:ext uri="{FF2B5EF4-FFF2-40B4-BE49-F238E27FC236}">
+                <a16:creationId xmlns:a16="http://schemas.microsoft.com/office/drawing/2014/main" id="{FAE2478B-D8A8-723E-6C8E-9F0164CDEEC6}"/>
+              </a:ext>
+            </a:extLst>
+          </p:cNvPr>
+          <p:cNvSpPr txBox="1"/>
+          <p:nvPr/>
+        </p:nvSpPr>
+        <p:spPr>
+          <a:xfrm>
+            <a:off x="8775290" y="2276237"/>
+            <a:ext cx="870153" cy="369332"/>
+          </a:xfrm>
+          <a:prstGeom prst="rect">
+            <a:avLst/>
+          </a:prstGeom>
+          <a:noFill/>
+          <a:ln>
+            <a:solidFill>
+              <a:schemeClr val="tx1"/>
+            </a:solidFill>
+          </a:ln>
+        </p:spPr>
+        <p:txBody>
+          <a:bodyPr wrap="square" rtlCol="0">
+            <a:spAutoFit/>
+          </a:bodyPr>
+          <a:lstStyle/>
+          <a:p>
+            <a:r>
+              <a:rPr lang="fr-FR" dirty="0"/>
+              <a:t>Crête</a:t>
+            </a:r>
+          </a:p>
+        </p:txBody>
+      </p:sp>
+      <p:sp>
+        <p:nvSpPr>
+          <p:cNvPr id="10" name="ZoneTexte 9">
+            <a:extLst>
+              <a:ext uri="{FF2B5EF4-FFF2-40B4-BE49-F238E27FC236}">
+                <a16:creationId xmlns:a16="http://schemas.microsoft.com/office/drawing/2014/main" id="{C79129CD-FE0E-E53F-3ED1-8B2AE498E6ED}"/>
+              </a:ext>
+            </a:extLst>
+          </p:cNvPr>
+          <p:cNvSpPr txBox="1"/>
+          <p:nvPr/>
+        </p:nvSpPr>
+        <p:spPr>
+          <a:xfrm>
+            <a:off x="7676535" y="3029004"/>
+            <a:ext cx="2008240" cy="369332"/>
+          </a:xfrm>
+          <a:prstGeom prst="rect">
+            <a:avLst/>
+          </a:prstGeom>
+          <a:noFill/>
+        </p:spPr>
+        <p:txBody>
+          <a:bodyPr wrap="square" rtlCol="0">
+            <a:spAutoFit/>
+          </a:bodyPr>
+          <a:lstStyle/>
+          <a:p>
+            <a:r>
+              <a:rPr lang="fr-FR" dirty="0"/>
+              <a:t>pente &gt;=0,15</a:t>
+            </a:r>
+          </a:p>
+        </p:txBody>
+      </p:sp>
+      <p:sp>
+        <p:nvSpPr>
+          <p:cNvPr id="12" name="ZoneTexte 11">
+            <a:extLst>
+              <a:ext uri="{FF2B5EF4-FFF2-40B4-BE49-F238E27FC236}">
+                <a16:creationId xmlns:a16="http://schemas.microsoft.com/office/drawing/2014/main" id="{41474DA0-D0B6-05DA-4D91-9703DB7BDD4E}"/>
+              </a:ext>
+            </a:extLst>
+          </p:cNvPr>
+          <p:cNvSpPr txBox="1"/>
+          <p:nvPr/>
+        </p:nvSpPr>
+        <p:spPr>
+          <a:xfrm>
+            <a:off x="4087449" y="3134920"/>
+            <a:ext cx="1587915" cy="369332"/>
+          </a:xfrm>
+          <a:prstGeom prst="rect">
+            <a:avLst/>
+          </a:prstGeom>
+          <a:noFill/>
+        </p:spPr>
+        <p:txBody>
+          <a:bodyPr wrap="square" rtlCol="0">
+            <a:spAutoFit/>
+          </a:bodyPr>
+          <a:lstStyle/>
+          <a:p>
+            <a:r>
+              <a:rPr lang="fr-FR" dirty="0"/>
+              <a:t>pente&lt;0,15</a:t>
+            </a:r>
+          </a:p>
+        </p:txBody>
+      </p:sp>
+      <p:sp>
+        <p:nvSpPr>
+          <p:cNvPr id="14" name="ZoneTexte 13">
+            <a:extLst>
+              <a:ext uri="{FF2B5EF4-FFF2-40B4-BE49-F238E27FC236}">
+                <a16:creationId xmlns:a16="http://schemas.microsoft.com/office/drawing/2014/main" id="{B37D58CD-517B-F15B-34BF-79A6CC7B64FC}"/>
+              </a:ext>
+            </a:extLst>
+          </p:cNvPr>
+          <p:cNvSpPr txBox="1"/>
+          <p:nvPr/>
+        </p:nvSpPr>
+        <p:spPr>
+          <a:xfrm>
+            <a:off x="2312422" y="4862604"/>
+            <a:ext cx="1372829" cy="369332"/>
+          </a:xfrm>
+          <a:prstGeom prst="rect">
+            <a:avLst/>
+          </a:prstGeom>
+          <a:noFill/>
+        </p:spPr>
+        <p:txBody>
+          <a:bodyPr wrap="square">
+            <a:spAutoFit/>
+          </a:bodyPr>
+          <a:lstStyle/>
+          <a:p>
+            <a:r>
+              <a:rPr lang="fr-FR" dirty="0"/>
+              <a:t>MNT &lt;= -33</a:t>
+            </a:r>
+          </a:p>
+        </p:txBody>
+      </p:sp>
+      <p:sp>
+        <p:nvSpPr>
+          <p:cNvPr id="16" name="ZoneTexte 15">
+            <a:extLst>
+              <a:ext uri="{FF2B5EF4-FFF2-40B4-BE49-F238E27FC236}">
+                <a16:creationId xmlns:a16="http://schemas.microsoft.com/office/drawing/2014/main" id="{7BC45E82-3BB3-D4A0-1F3C-808DFAC5A30A}"/>
+              </a:ext>
+            </a:extLst>
+          </p:cNvPr>
+          <p:cNvSpPr txBox="1"/>
+          <p:nvPr/>
+        </p:nvSpPr>
+        <p:spPr>
+          <a:xfrm>
+            <a:off x="6341798" y="4922466"/>
+            <a:ext cx="1372829" cy="369332"/>
+          </a:xfrm>
+          <a:prstGeom prst="rect">
+            <a:avLst/>
+          </a:prstGeom>
+          <a:noFill/>
+        </p:spPr>
+        <p:txBody>
+          <a:bodyPr wrap="square">
+            <a:spAutoFit/>
+          </a:bodyPr>
+          <a:lstStyle/>
+          <a:p>
+            <a:r>
+              <a:rPr lang="fr-FR" dirty="0"/>
+              <a:t>MNT &gt;= -27</a:t>
+            </a:r>
+          </a:p>
+        </p:txBody>
+      </p:sp>
+      <p:sp>
+        <p:nvSpPr>
+          <p:cNvPr id="18" name="ZoneTexte 17">
+            <a:extLst>
+              <a:ext uri="{FF2B5EF4-FFF2-40B4-BE49-F238E27FC236}">
+                <a16:creationId xmlns:a16="http://schemas.microsoft.com/office/drawing/2014/main" id="{DE7513E4-7943-F6E7-B7E8-A0F41BF39551}"/>
+              </a:ext>
+            </a:extLst>
+          </p:cNvPr>
+          <p:cNvSpPr txBox="1"/>
+          <p:nvPr/>
+        </p:nvSpPr>
+        <p:spPr>
+          <a:xfrm>
+            <a:off x="4291778" y="5456889"/>
+            <a:ext cx="2002093" cy="369332"/>
+          </a:xfrm>
+          <a:prstGeom prst="rect">
+            <a:avLst/>
+          </a:prstGeom>
+          <a:noFill/>
+        </p:spPr>
+        <p:txBody>
+          <a:bodyPr wrap="square">
+            <a:spAutoFit/>
+          </a:bodyPr>
+          <a:lstStyle/>
+          <a:p>
+            <a:r>
+              <a:rPr lang="fr-FR" dirty="0"/>
+              <a:t>-33&lt;MNT &lt; -27</a:t>
+            </a:r>
+          </a:p>
+        </p:txBody>
+      </p:sp>
+      <p:cxnSp>
+        <p:nvCxnSpPr>
+          <p:cNvPr id="20" name="Connecteur droit avec flèche 19">
+            <a:extLst>
+              <a:ext uri="{FF2B5EF4-FFF2-40B4-BE49-F238E27FC236}">
+                <a16:creationId xmlns:a16="http://schemas.microsoft.com/office/drawing/2014/main" id="{AFF4D2A2-EF90-BFA9-6E61-FE77942B0684}"/>
+              </a:ext>
+            </a:extLst>
+          </p:cNvPr>
+          <p:cNvCxnSpPr>
+            <a:cxnSpLocks/>
+            <a:stCxn id="4" idx="2"/>
+            <a:endCxn id="8" idx="0"/>
+          </p:cNvCxnSpPr>
+          <p:nvPr/>
+        </p:nvCxnSpPr>
+        <p:spPr>
+          <a:xfrm flipH="1">
+            <a:off x="2998838" y="856168"/>
+            <a:ext cx="3143865" cy="1420069"/>
+          </a:xfrm>
+          <a:prstGeom prst="straightConnector1">
+            <a:avLst/>
+          </a:prstGeom>
+          <a:ln w="38100">
+            <a:solidFill>
+              <a:schemeClr val="tx1"/>
+            </a:solidFill>
+            <a:tailEnd type="triangle"/>
+          </a:ln>
+        </p:spPr>
+        <p:style>
+          <a:lnRef idx="2">
+            <a:schemeClr val="accent1"/>
+          </a:lnRef>
+          <a:fillRef idx="0">
+            <a:schemeClr val="accent1"/>
+          </a:fillRef>
+          <a:effectRef idx="1">
+            <a:schemeClr val="accent1"/>
+          </a:effectRef>
+          <a:fontRef idx="minor">
+            <a:schemeClr val="tx1"/>
+          </a:fontRef>
+        </p:style>
+      </p:cxnSp>
+      <p:cxnSp>
+        <p:nvCxnSpPr>
+          <p:cNvPr id="22" name="Connecteur droit avec flèche 21">
+            <a:extLst>
+              <a:ext uri="{FF2B5EF4-FFF2-40B4-BE49-F238E27FC236}">
+                <a16:creationId xmlns:a16="http://schemas.microsoft.com/office/drawing/2014/main" id="{6DC2D12A-D856-5470-CC5C-097A409EED86}"/>
+              </a:ext>
+            </a:extLst>
+          </p:cNvPr>
+          <p:cNvCxnSpPr>
+            <a:cxnSpLocks/>
+            <a:stCxn id="4" idx="2"/>
+          </p:cNvCxnSpPr>
+          <p:nvPr/>
+        </p:nvCxnSpPr>
+        <p:spPr>
+          <a:xfrm flipH="1">
+            <a:off x="6095998" y="856168"/>
+            <a:ext cx="46705" cy="1420069"/>
+          </a:xfrm>
+          <a:prstGeom prst="straightConnector1">
+            <a:avLst/>
+          </a:prstGeom>
+          <a:ln w="38100">
+            <a:solidFill>
+              <a:schemeClr val="tx1"/>
+            </a:solidFill>
+            <a:tailEnd type="triangle"/>
+          </a:ln>
+        </p:spPr>
+        <p:style>
+          <a:lnRef idx="2">
+            <a:schemeClr val="accent1"/>
+          </a:lnRef>
+          <a:fillRef idx="0">
+            <a:schemeClr val="accent1"/>
+          </a:fillRef>
+          <a:effectRef idx="1">
+            <a:schemeClr val="accent1"/>
+          </a:effectRef>
+          <a:fontRef idx="minor">
+            <a:schemeClr val="tx1"/>
+          </a:fontRef>
+        </p:style>
+      </p:cxnSp>
+      <p:cxnSp>
+        <p:nvCxnSpPr>
+          <p:cNvPr id="25" name="Connecteur droit avec flèche 24">
+            <a:extLst>
+              <a:ext uri="{FF2B5EF4-FFF2-40B4-BE49-F238E27FC236}">
+                <a16:creationId xmlns:a16="http://schemas.microsoft.com/office/drawing/2014/main" id="{2124AB5F-635B-73BA-1DEE-240AD4CC9556}"/>
+              </a:ext>
+            </a:extLst>
+          </p:cNvPr>
+          <p:cNvCxnSpPr>
+            <a:cxnSpLocks/>
+            <a:stCxn id="4" idx="2"/>
+            <a:endCxn id="9" idx="0"/>
+          </p:cNvCxnSpPr>
+          <p:nvPr/>
+        </p:nvCxnSpPr>
+        <p:spPr>
+          <a:xfrm>
+            <a:off x="6142703" y="856168"/>
+            <a:ext cx="3067664" cy="1420069"/>
+          </a:xfrm>
+          <a:prstGeom prst="straightConnector1">
+            <a:avLst/>
+          </a:prstGeom>
+          <a:ln w="38100">
+            <a:solidFill>
+              <a:schemeClr val="tx1"/>
+            </a:solidFill>
+            <a:tailEnd type="triangle"/>
+          </a:ln>
+        </p:spPr>
+        <p:style>
+          <a:lnRef idx="2">
+            <a:schemeClr val="accent1"/>
+          </a:lnRef>
+          <a:fillRef idx="0">
+            <a:schemeClr val="accent1"/>
+          </a:fillRef>
+          <a:effectRef idx="1">
+            <a:schemeClr val="accent1"/>
+          </a:effectRef>
+          <a:fontRef idx="minor">
+            <a:schemeClr val="tx1"/>
+          </a:fontRef>
+        </p:style>
+      </p:cxnSp>
+      <p:sp>
+        <p:nvSpPr>
+          <p:cNvPr id="28" name="ZoneTexte 27">
+            <a:extLst>
+              <a:ext uri="{FF2B5EF4-FFF2-40B4-BE49-F238E27FC236}">
+                <a16:creationId xmlns:a16="http://schemas.microsoft.com/office/drawing/2014/main" id="{C988EC64-E0F5-A9EB-8244-5329599A8E3A}"/>
+              </a:ext>
+            </a:extLst>
+          </p:cNvPr>
+          <p:cNvSpPr txBox="1"/>
+          <p:nvPr/>
+        </p:nvSpPr>
+        <p:spPr>
+          <a:xfrm>
+            <a:off x="5392993" y="2285291"/>
+            <a:ext cx="1553496" cy="369332"/>
+          </a:xfrm>
+          <a:prstGeom prst="rect">
+            <a:avLst/>
+          </a:prstGeom>
+          <a:noFill/>
+          <a:ln>
+            <a:solidFill>
+              <a:schemeClr val="tx1"/>
+            </a:solidFill>
+            <a:prstDash val="dash"/>
+          </a:ln>
+        </p:spPr>
+        <p:txBody>
+          <a:bodyPr wrap="square" rtlCol="0">
+            <a:spAutoFit/>
+          </a:bodyPr>
+          <a:lstStyle/>
+          <a:p>
+            <a:r>
+              <a:rPr lang="fr-FR" dirty="0"/>
+              <a:t>Pente Evans ?</a:t>
+            </a:r>
+          </a:p>
+        </p:txBody>
+      </p:sp>
+      <p:cxnSp>
+        <p:nvCxnSpPr>
+          <p:cNvPr id="29" name="Connecteur droit avec flèche 28">
+            <a:extLst>
+              <a:ext uri="{FF2B5EF4-FFF2-40B4-BE49-F238E27FC236}">
+                <a16:creationId xmlns:a16="http://schemas.microsoft.com/office/drawing/2014/main" id="{33C6C79E-1127-EC41-B044-2A1762775480}"/>
+              </a:ext>
+            </a:extLst>
+          </p:cNvPr>
+          <p:cNvCxnSpPr>
+            <a:cxnSpLocks/>
+            <a:stCxn id="28" idx="2"/>
+            <a:endCxn id="46" idx="0"/>
+          </p:cNvCxnSpPr>
+          <p:nvPr/>
+        </p:nvCxnSpPr>
+        <p:spPr>
+          <a:xfrm>
+            <a:off x="6169741" y="2654623"/>
+            <a:ext cx="3175366" cy="1487426"/>
+          </a:xfrm>
+          <a:prstGeom prst="straightConnector1">
+            <a:avLst/>
+          </a:prstGeom>
+          <a:ln w="38100">
+            <a:solidFill>
+              <a:schemeClr val="tx1"/>
+            </a:solidFill>
+            <a:tailEnd type="triangle"/>
+          </a:ln>
+        </p:spPr>
+        <p:style>
+          <a:lnRef idx="2">
+            <a:schemeClr val="accent1"/>
+          </a:lnRef>
+          <a:fillRef idx="0">
+            <a:schemeClr val="accent1"/>
+          </a:fillRef>
+          <a:effectRef idx="1">
+            <a:schemeClr val="accent1"/>
+          </a:effectRef>
+          <a:fontRef idx="minor">
+            <a:schemeClr val="tx1"/>
+          </a:fontRef>
+        </p:style>
+      </p:cxnSp>
+      <p:cxnSp>
+        <p:nvCxnSpPr>
+          <p:cNvPr id="36" name="Connecteur droit avec flèche 35">
+            <a:extLst>
+              <a:ext uri="{FF2B5EF4-FFF2-40B4-BE49-F238E27FC236}">
+                <a16:creationId xmlns:a16="http://schemas.microsoft.com/office/drawing/2014/main" id="{0BD57B0A-D441-074F-7610-886B7C776BBF}"/>
+              </a:ext>
+            </a:extLst>
+          </p:cNvPr>
+          <p:cNvCxnSpPr>
+            <a:cxnSpLocks/>
+            <a:stCxn id="28" idx="2"/>
+            <a:endCxn id="44" idx="0"/>
+          </p:cNvCxnSpPr>
+          <p:nvPr/>
+        </p:nvCxnSpPr>
+        <p:spPr>
+          <a:xfrm flipH="1">
+            <a:off x="5172538" y="2654623"/>
+            <a:ext cx="997203" cy="1357460"/>
+          </a:xfrm>
+          <a:prstGeom prst="straightConnector1">
+            <a:avLst/>
+          </a:prstGeom>
+          <a:ln w="38100">
+            <a:solidFill>
+              <a:schemeClr val="tx1"/>
+            </a:solidFill>
+            <a:tailEnd type="triangle"/>
+          </a:ln>
+        </p:spPr>
+        <p:style>
+          <a:lnRef idx="2">
+            <a:schemeClr val="accent1"/>
+          </a:lnRef>
+          <a:fillRef idx="0">
+            <a:schemeClr val="accent1"/>
+          </a:fillRef>
+          <a:effectRef idx="1">
+            <a:schemeClr val="accent1"/>
+          </a:effectRef>
+          <a:fontRef idx="minor">
+            <a:schemeClr val="tx1"/>
+          </a:fontRef>
+        </p:style>
+      </p:cxnSp>
+      <p:sp>
+        <p:nvSpPr>
+          <p:cNvPr id="44" name="ZoneTexte 43">
+            <a:extLst>
+              <a:ext uri="{FF2B5EF4-FFF2-40B4-BE49-F238E27FC236}">
+                <a16:creationId xmlns:a16="http://schemas.microsoft.com/office/drawing/2014/main" id="{467687BF-D06A-DE61-872D-F0998A5B94A8}"/>
+              </a:ext>
+            </a:extLst>
+          </p:cNvPr>
+          <p:cNvSpPr txBox="1"/>
+          <p:nvPr/>
+        </p:nvSpPr>
+        <p:spPr>
+          <a:xfrm>
+            <a:off x="4440344" y="4012083"/>
+            <a:ext cx="1464387" cy="646331"/>
+          </a:xfrm>
+          <a:prstGeom prst="rect">
+            <a:avLst/>
+          </a:prstGeom>
+          <a:noFill/>
+          <a:ln>
+            <a:solidFill>
+              <a:schemeClr val="tx1"/>
+            </a:solidFill>
+            <a:prstDash val="dash"/>
+          </a:ln>
+        </p:spPr>
+        <p:txBody>
+          <a:bodyPr wrap="square" rtlCol="0">
+            <a:spAutoFit/>
+          </a:bodyPr>
+          <a:lstStyle/>
+          <a:p>
+            <a:pPr algn="ctr"/>
+            <a:r>
+              <a:rPr lang="fr-FR" dirty="0"/>
+              <a:t>Plat</a:t>
+            </a:r>
+          </a:p>
+          <a:p>
+            <a:pPr algn="ctr"/>
+            <a:r>
+              <a:rPr lang="fr-FR" dirty="0"/>
+              <a:t>Profondeur?</a:t>
+            </a:r>
+          </a:p>
+        </p:txBody>
+      </p:sp>
+      <p:sp>
+        <p:nvSpPr>
+          <p:cNvPr id="46" name="ZoneTexte 45">
+            <a:extLst>
+              <a:ext uri="{FF2B5EF4-FFF2-40B4-BE49-F238E27FC236}">
+                <a16:creationId xmlns:a16="http://schemas.microsoft.com/office/drawing/2014/main" id="{75A43F89-28F5-2459-7E1C-EEC68FEEB6C9}"/>
+              </a:ext>
+            </a:extLst>
+          </p:cNvPr>
+          <p:cNvSpPr txBox="1"/>
+          <p:nvPr/>
+        </p:nvSpPr>
+        <p:spPr>
+          <a:xfrm>
+            <a:off x="8670367" y="4142049"/>
+            <a:ext cx="1349479" cy="369332"/>
+          </a:xfrm>
+          <a:prstGeom prst="rect">
+            <a:avLst/>
+          </a:prstGeom>
+          <a:noFill/>
+          <a:ln>
+            <a:solidFill>
+              <a:schemeClr val="tx1"/>
+            </a:solidFill>
+          </a:ln>
+        </p:spPr>
+        <p:txBody>
+          <a:bodyPr wrap="square" rtlCol="0">
+            <a:spAutoFit/>
+          </a:bodyPr>
+          <a:lstStyle/>
+          <a:p>
+            <a:r>
+              <a:rPr lang="fr-FR" dirty="0"/>
+              <a:t>Pente raide</a:t>
+            </a:r>
+          </a:p>
+        </p:txBody>
+      </p:sp>
+      <p:sp>
+        <p:nvSpPr>
+          <p:cNvPr id="50" name="ZoneTexte 49">
+            <a:extLst>
+              <a:ext uri="{FF2B5EF4-FFF2-40B4-BE49-F238E27FC236}">
+                <a16:creationId xmlns:a16="http://schemas.microsoft.com/office/drawing/2014/main" id="{3C3DCD13-744F-E77E-D1EF-7EFCA1A5A0B9}"/>
+              </a:ext>
+            </a:extLst>
+          </p:cNvPr>
+          <p:cNvSpPr txBox="1"/>
+          <p:nvPr/>
+        </p:nvSpPr>
+        <p:spPr>
+          <a:xfrm>
+            <a:off x="668593" y="6006818"/>
+            <a:ext cx="1553496" cy="369332"/>
+          </a:xfrm>
+          <a:prstGeom prst="rect">
+            <a:avLst/>
+          </a:prstGeom>
+          <a:noFill/>
+          <a:ln>
+            <a:solidFill>
+              <a:schemeClr val="tx1"/>
+            </a:solidFill>
+          </a:ln>
+        </p:spPr>
+        <p:txBody>
+          <a:bodyPr wrap="square" rtlCol="0">
+            <a:spAutoFit/>
+          </a:bodyPr>
+          <a:lstStyle/>
+          <a:p>
+            <a:r>
+              <a:rPr lang="fr-FR" dirty="0"/>
+              <a:t>Plat profond</a:t>
+            </a:r>
+          </a:p>
+        </p:txBody>
+      </p:sp>
+      <p:sp>
+        <p:nvSpPr>
+          <p:cNvPr id="51" name="ZoneTexte 50">
+            <a:extLst>
+              <a:ext uri="{FF2B5EF4-FFF2-40B4-BE49-F238E27FC236}">
+                <a16:creationId xmlns:a16="http://schemas.microsoft.com/office/drawing/2014/main" id="{76ED1229-EC0B-EDC2-B175-0F9155924E14}"/>
+              </a:ext>
+            </a:extLst>
+          </p:cNvPr>
+          <p:cNvSpPr txBox="1"/>
+          <p:nvPr/>
+        </p:nvSpPr>
+        <p:spPr>
+          <a:xfrm>
+            <a:off x="3257549" y="6024927"/>
+            <a:ext cx="1421992" cy="369332"/>
+          </a:xfrm>
+          <a:prstGeom prst="rect">
+            <a:avLst/>
+          </a:prstGeom>
+          <a:noFill/>
+          <a:ln>
+            <a:solidFill>
+              <a:schemeClr val="tx1"/>
+            </a:solidFill>
+          </a:ln>
+        </p:spPr>
+        <p:txBody>
+          <a:bodyPr wrap="square" rtlCol="0">
+            <a:spAutoFit/>
+          </a:bodyPr>
+          <a:lstStyle/>
+          <a:p>
+            <a:r>
+              <a:rPr lang="fr-FR" dirty="0"/>
+              <a:t>Plat moyen</a:t>
+            </a:r>
+          </a:p>
+        </p:txBody>
+      </p:sp>
+      <p:sp>
+        <p:nvSpPr>
+          <p:cNvPr id="52" name="ZoneTexte 51">
+            <a:extLst>
+              <a:ext uri="{FF2B5EF4-FFF2-40B4-BE49-F238E27FC236}">
+                <a16:creationId xmlns:a16="http://schemas.microsoft.com/office/drawing/2014/main" id="{D2976903-1183-9CF7-DF87-9016592FA32E}"/>
+              </a:ext>
+            </a:extLst>
+          </p:cNvPr>
+          <p:cNvSpPr txBox="1"/>
+          <p:nvPr/>
+        </p:nvSpPr>
+        <p:spPr>
+          <a:xfrm>
+            <a:off x="6508330" y="6001832"/>
+            <a:ext cx="1897629" cy="369332"/>
+          </a:xfrm>
+          <a:prstGeom prst="rect">
+            <a:avLst/>
+          </a:prstGeom>
+          <a:noFill/>
+          <a:ln>
+            <a:solidFill>
+              <a:schemeClr val="tx1"/>
+            </a:solidFill>
+          </a:ln>
+        </p:spPr>
+        <p:txBody>
+          <a:bodyPr wrap="square" rtlCol="0">
+            <a:spAutoFit/>
+          </a:bodyPr>
+          <a:lstStyle/>
+          <a:p>
+            <a:r>
+              <a:rPr lang="fr-FR" dirty="0"/>
+              <a:t>Plat peu profond</a:t>
+            </a:r>
+          </a:p>
+        </p:txBody>
+      </p:sp>
+      <p:cxnSp>
+        <p:nvCxnSpPr>
+          <p:cNvPr id="53" name="Connecteur droit avec flèche 52">
+            <a:extLst>
+              <a:ext uri="{FF2B5EF4-FFF2-40B4-BE49-F238E27FC236}">
+                <a16:creationId xmlns:a16="http://schemas.microsoft.com/office/drawing/2014/main" id="{F7A28679-ADA9-7AA8-0E32-944E701FD204}"/>
+              </a:ext>
+            </a:extLst>
+          </p:cNvPr>
+          <p:cNvCxnSpPr>
+            <a:cxnSpLocks/>
+            <a:stCxn id="44" idx="2"/>
+            <a:endCxn id="50" idx="0"/>
+          </p:cNvCxnSpPr>
+          <p:nvPr/>
+        </p:nvCxnSpPr>
+        <p:spPr>
+          <a:xfrm flipH="1">
+            <a:off x="1445341" y="4658414"/>
+            <a:ext cx="3727197" cy="1348404"/>
+          </a:xfrm>
+          <a:prstGeom prst="straightConnector1">
+            <a:avLst/>
+          </a:prstGeom>
+          <a:ln w="38100">
+            <a:solidFill>
+              <a:schemeClr val="tx1"/>
+            </a:solidFill>
+            <a:tailEnd type="triangle"/>
+          </a:ln>
+        </p:spPr>
+        <p:style>
+          <a:lnRef idx="2">
+            <a:schemeClr val="accent1"/>
+          </a:lnRef>
+          <a:fillRef idx="0">
+            <a:schemeClr val="accent1"/>
+          </a:fillRef>
+          <a:effectRef idx="1">
+            <a:schemeClr val="accent1"/>
+          </a:effectRef>
+          <a:fontRef idx="minor">
+            <a:schemeClr val="tx1"/>
+          </a:fontRef>
+        </p:style>
+      </p:cxnSp>
+      <p:cxnSp>
+        <p:nvCxnSpPr>
+          <p:cNvPr id="56" name="Connecteur droit avec flèche 55">
+            <a:extLst>
+              <a:ext uri="{FF2B5EF4-FFF2-40B4-BE49-F238E27FC236}">
+                <a16:creationId xmlns:a16="http://schemas.microsoft.com/office/drawing/2014/main" id="{3491EE9C-273E-5B4B-CBFC-EA766A48544B}"/>
+              </a:ext>
+            </a:extLst>
+          </p:cNvPr>
+          <p:cNvCxnSpPr>
+            <a:cxnSpLocks/>
+            <a:stCxn id="44" idx="2"/>
+            <a:endCxn id="51" idx="0"/>
+          </p:cNvCxnSpPr>
+          <p:nvPr/>
+        </p:nvCxnSpPr>
+        <p:spPr>
+          <a:xfrm flipH="1">
+            <a:off x="3968545" y="4658414"/>
+            <a:ext cx="1203993" cy="1366513"/>
+          </a:xfrm>
+          <a:prstGeom prst="straightConnector1">
+            <a:avLst/>
+          </a:prstGeom>
+          <a:ln w="38100">
+            <a:solidFill>
+              <a:schemeClr val="tx1"/>
+            </a:solidFill>
+            <a:tailEnd type="triangle"/>
+          </a:ln>
+        </p:spPr>
+        <p:style>
+          <a:lnRef idx="2">
+            <a:schemeClr val="accent1"/>
+          </a:lnRef>
+          <a:fillRef idx="0">
+            <a:schemeClr val="accent1"/>
+          </a:fillRef>
+          <a:effectRef idx="1">
+            <a:schemeClr val="accent1"/>
+          </a:effectRef>
+          <a:fontRef idx="minor">
+            <a:schemeClr val="tx1"/>
+          </a:fontRef>
+        </p:style>
+      </p:cxnSp>
+      <p:cxnSp>
+        <p:nvCxnSpPr>
+          <p:cNvPr id="59" name="Connecteur droit avec flèche 58">
+            <a:extLst>
+              <a:ext uri="{FF2B5EF4-FFF2-40B4-BE49-F238E27FC236}">
+                <a16:creationId xmlns:a16="http://schemas.microsoft.com/office/drawing/2014/main" id="{1AF9A9A4-69D2-B22C-05E4-A790A6868009}"/>
+              </a:ext>
+            </a:extLst>
+          </p:cNvPr>
+          <p:cNvCxnSpPr>
+            <a:cxnSpLocks/>
+            <a:stCxn id="44" idx="2"/>
+            <a:endCxn id="52" idx="0"/>
+          </p:cNvCxnSpPr>
+          <p:nvPr/>
+        </p:nvCxnSpPr>
+        <p:spPr>
+          <a:xfrm>
+            <a:off x="5172538" y="4658414"/>
+            <a:ext cx="2284607" cy="1343418"/>
+          </a:xfrm>
+          <a:prstGeom prst="straightConnector1">
+            <a:avLst/>
+          </a:prstGeom>
+          <a:ln w="38100">
+            <a:solidFill>
+              <a:schemeClr val="tx1"/>
+            </a:solidFill>
+            <a:tailEnd type="triangle"/>
+          </a:ln>
+        </p:spPr>
+        <p:style>
+          <a:lnRef idx="2">
+            <a:schemeClr val="accent1"/>
+          </a:lnRef>
+          <a:fillRef idx="0">
+            <a:schemeClr val="accent1"/>
+          </a:fillRef>
+          <a:effectRef idx="1">
+            <a:schemeClr val="accent1"/>
+          </a:effectRef>
+          <a:fontRef idx="minor">
+            <a:schemeClr val="tx1"/>
+          </a:fontRef>
+        </p:style>
+      </p:cxnSp>
+    </p:spTree>
+    <p:extLst>
+      <p:ext uri="{BB962C8B-B14F-4D97-AF65-F5344CB8AC3E}">
+        <p14:creationId xmlns:p14="http://schemas.microsoft.com/office/powerpoint/2010/main" val="1868857312"/>
       </p:ext>
     </p:extLst>
   </p:cSld>
